--- a/docs/contest/serov-contest-2026-submission.pptx
+++ b/docs/contest/serov-contest-2026-submission.pptx
@@ -2,21 +2,21 @@
 <file path=ppt/presentation.xml><?xml version="1.0" encoding="utf-8"?>
 <p:presentation xmlns:p="http://schemas.openxmlformats.org/presentationml/2006/main">
   <p:sldMasterIdLst>
-    <p:sldMasterId xmlns:r="http://schemas.openxmlformats.org/officeDocument/2006/relationships" id="2147483648" r:id="R70a847e57c4e4c5e"/>
+    <p:sldMasterId xmlns:r="http://schemas.openxmlformats.org/officeDocument/2006/relationships" id="2147483648" r:id="R2471b45d07e64230"/>
   </p:sldMasterIdLst>
   <p:notesMasterIdLst>
-    <p:notesMasterId xmlns:r="http://schemas.openxmlformats.org/officeDocument/2006/relationships" r:id="R7f8ce9283747426b"/>
+    <p:notesMasterId xmlns:r="http://schemas.openxmlformats.org/officeDocument/2006/relationships" r:id="Rbc725b1a76bb497f"/>
   </p:notesMasterIdLst>
   <p:sldIdLst>
-    <p:sldId xmlns:r="http://schemas.openxmlformats.org/officeDocument/2006/relationships" id="256" r:id="R4168b4d162454f5f"/>
-    <p:sldId xmlns:r="http://schemas.openxmlformats.org/officeDocument/2006/relationships" id="257" r:id="Rf9001a10ba5e4cf6"/>
-    <p:sldId xmlns:r="http://schemas.openxmlformats.org/officeDocument/2006/relationships" id="258" r:id="R9baaba77fac24f5a"/>
-    <p:sldId xmlns:r="http://schemas.openxmlformats.org/officeDocument/2006/relationships" id="259" r:id="R9370a7c3e09247fe"/>
-    <p:sldId xmlns:r="http://schemas.openxmlformats.org/officeDocument/2006/relationships" id="260" r:id="Red8240f926764f23"/>
-    <p:sldId xmlns:r="http://schemas.openxmlformats.org/officeDocument/2006/relationships" id="261" r:id="R8d1e9dba79a64e4a"/>
-    <p:sldId xmlns:r="http://schemas.openxmlformats.org/officeDocument/2006/relationships" id="262" r:id="Rba087dff55984b31"/>
-    <p:sldId xmlns:r="http://schemas.openxmlformats.org/officeDocument/2006/relationships" id="263" r:id="R134e4092f54347a3"/>
-    <p:sldId xmlns:r="http://schemas.openxmlformats.org/officeDocument/2006/relationships" id="264" r:id="Rd4f5ce680b294e21"/>
+    <p:sldId xmlns:r="http://schemas.openxmlformats.org/officeDocument/2006/relationships" id="256" r:id="Rb3a83d472b75404f"/>
+    <p:sldId xmlns:r="http://schemas.openxmlformats.org/officeDocument/2006/relationships" id="257" r:id="R3bfadb21e9bb4b43"/>
+    <p:sldId xmlns:r="http://schemas.openxmlformats.org/officeDocument/2006/relationships" id="258" r:id="R9cdc559d6aeb44a3"/>
+    <p:sldId xmlns:r="http://schemas.openxmlformats.org/officeDocument/2006/relationships" id="259" r:id="Rc7de5540b4be4bde"/>
+    <p:sldId xmlns:r="http://schemas.openxmlformats.org/officeDocument/2006/relationships" id="260" r:id="R747654d49053458a"/>
+    <p:sldId xmlns:r="http://schemas.openxmlformats.org/officeDocument/2006/relationships" id="261" r:id="R75722aabf3cd4839"/>
+    <p:sldId xmlns:r="http://schemas.openxmlformats.org/officeDocument/2006/relationships" id="262" r:id="R03992b8ab72e40fd"/>
+    <p:sldId xmlns:r="http://schemas.openxmlformats.org/officeDocument/2006/relationships" id="263" r:id="R8664d4b262254f3c"/>
+    <p:sldId xmlns:r="http://schemas.openxmlformats.org/officeDocument/2006/relationships" id="264" r:id="R55a006ef3d9449b0"/>
   </p:sldIdLst>
   <p:sldSz cx="12192000" cy="6858000"/>
   <p:notesSz cx="6858000" cy="9144000"/>
@@ -590,7 +590,7 @@
           <a:lstStyle xmlns:a="http://schemas.openxmlformats.org/drawingml/2006/main"/>
           <a:p xmlns:a="http://schemas.openxmlformats.org/drawingml/2006/main">
             <a:r>
-              <a:t>根拠: docs/firmware/ARCHITECTURE.md、firmware/ra8p1/SoundExplorationRover_CPU0/src/config/task_config.h、firmware/ra8p1/SoundExplorationRover_CPU1/src/。CPU1の1 ms周期と1.5秒timeoutはソースおよび設計書に記載。</a:t>
+              <a:t>出典: docs/contest/assets/serov-one-page.png（再生成元: docs/contest/assets/render_one_page.py）。構成の根拠: docs/firmware/ARCHITECTURE.md。実機写真: docs/contest/assets/rover-angle.jpg、rover-top.jpg。</a:t>
             </a:r>
           </a:p>
         </p:txBody>
@@ -1078,7 +1078,7 @@
   </p:cSld>
   <p:clrMap bg1="lt1" tx1="dk1" bg2="lt2" tx2="dk2" accent1="accent1" accent2="accent2" accent3="accent3" accent4="accent4" accent5="accent5" accent6="accent6" hlink="hlink" folHlink="folHlink"/>
   <p:sldLayoutIdLst>
-    <p:sldLayoutId xmlns:r="http://schemas.openxmlformats.org/officeDocument/2006/relationships" id="2147483649" r:id="R8ce219568b754353"/>
+    <p:sldLayoutId xmlns:r="http://schemas.openxmlformats.org/officeDocument/2006/relationships" id="2147483649" r:id="R05d89ac0731c49fe"/>
   </p:sldLayoutIdLst>
   <p:txStyles>
     <p:titleStyle>
@@ -1658,6 +1658,7 @@
           <a:lstStyle xmlns:a="http://schemas.openxmlformats.org/drawingml/2006/main"/>
           <a:p xmlns:a="http://schemas.openxmlformats.org/drawingml/2006/main">
             <a:pPr algn="l">
+              <a:buNone/>
               <a:defRPr sz="4050" b="1">
                 <a:solidFill>
                   <a:srgbClr val="17313E"/>
@@ -1681,6 +1682,7 @@
           </a:p>
           <a:p xmlns:a="http://schemas.openxmlformats.org/drawingml/2006/main">
             <a:pPr algn="l">
+              <a:buNone/>
               <a:defRPr sz="4050" b="1">
                 <a:solidFill>
                   <a:srgbClr val="17313E"/>
@@ -1738,6 +1740,7 @@
           <a:lstStyle xmlns:a="http://schemas.openxmlformats.org/drawingml/2006/main"/>
           <a:p xmlns:a="http://schemas.openxmlformats.org/drawingml/2006/main">
             <a:pPr algn="l">
+              <a:buNone/>
               <a:defRPr sz="1950" b="0">
                 <a:solidFill>
                   <a:srgbClr val="007F86"/>
@@ -1795,6 +1798,7 @@
           <a:lstStyle xmlns:a="http://schemas.openxmlformats.org/drawingml/2006/main"/>
           <a:p xmlns:a="http://schemas.openxmlformats.org/drawingml/2006/main">
             <a:pPr algn="l">
+              <a:buNone/>
               <a:defRPr sz="1575" b="0">
                 <a:solidFill>
                   <a:srgbClr val="45606C"/>
@@ -1818,6 +1822,7 @@
           </a:p>
           <a:p xmlns:a="http://schemas.openxmlformats.org/drawingml/2006/main">
             <a:pPr algn="l">
+              <a:buNone/>
               <a:defRPr sz="1575" b="0">
                 <a:solidFill>
                   <a:srgbClr val="45606C"/>
@@ -1843,14 +1848,14 @@
       </p:sp>
       <p:pic>
         <p:nvPicPr>
-          <p:cNvPr id="8" name=""/>
+          <p:cNvPr id="10" name=""/>
           <p:cNvPicPr>
             <a:picLocks xmlns:a="http://schemas.openxmlformats.org/drawingml/2006/main" noChangeAspect="1"/>
           </p:cNvPicPr>
           <p:nvPr/>
         </p:nvPicPr>
         <p:blipFill>
-          <a:blip xmlns:r="http://schemas.openxmlformats.org/officeDocument/2006/relationships" xmlns:a="http://schemas.openxmlformats.org/drawingml/2006/main" r:embed="Rf034b4e5da2649f6"/>
+          <a:blip xmlns:r="http://schemas.openxmlformats.org/officeDocument/2006/relationships" xmlns:a="http://schemas.openxmlformats.org/drawingml/2006/main" r:embed="R943976de4a9b4b8e"/>
           <a:stretch xmlns:a="http://schemas.openxmlformats.org/drawingml/2006/main"/>
         </p:blipFill>
         <p:spPr>
@@ -1926,6 +1931,7 @@
           <a:lstStyle xmlns:a="http://schemas.openxmlformats.org/drawingml/2006/main"/>
           <a:p xmlns:a="http://schemas.openxmlformats.org/drawingml/2006/main">
             <a:pPr algn="l">
+              <a:buNone/>
               <a:defRPr sz="3150" b="1">
                 <a:solidFill>
                   <a:srgbClr val="17313E"/>
@@ -1983,6 +1989,7 @@
           <a:lstStyle xmlns:a="http://schemas.openxmlformats.org/drawingml/2006/main"/>
           <a:p xmlns:a="http://schemas.openxmlformats.org/drawingml/2006/main">
             <a:pPr algn="l">
+              <a:buNone/>
               <a:defRPr sz="3375" b="1">
                 <a:solidFill>
                   <a:srgbClr val="007F86"/>
@@ -2040,6 +2047,7 @@
           <a:lstStyle xmlns:a="http://schemas.openxmlformats.org/drawingml/2006/main"/>
           <a:p xmlns:a="http://schemas.openxmlformats.org/drawingml/2006/main">
             <a:pPr algn="l">
+              <a:buNone/>
               <a:defRPr sz="2250" b="1">
                 <a:solidFill>
                   <a:srgbClr val="17313E"/>
@@ -2097,6 +2105,7 @@
           <a:lstStyle xmlns:a="http://schemas.openxmlformats.org/drawingml/2006/main"/>
           <a:p xmlns:a="http://schemas.openxmlformats.org/drawingml/2006/main">
             <a:pPr algn="l">
+              <a:buNone/>
               <a:defRPr sz="3375" b="1">
                 <a:solidFill>
                   <a:srgbClr val="007F86"/>
@@ -2154,6 +2163,7 @@
           <a:lstStyle xmlns:a="http://schemas.openxmlformats.org/drawingml/2006/main"/>
           <a:p xmlns:a="http://schemas.openxmlformats.org/drawingml/2006/main">
             <a:pPr algn="l">
+              <a:buNone/>
               <a:defRPr sz="2250" b="1">
                 <a:solidFill>
                   <a:srgbClr val="17313E"/>
@@ -2211,6 +2221,7 @@
           <a:lstStyle xmlns:a="http://schemas.openxmlformats.org/drawingml/2006/main"/>
           <a:p xmlns:a="http://schemas.openxmlformats.org/drawingml/2006/main">
             <a:pPr algn="l">
+              <a:buNone/>
               <a:defRPr sz="3375" b="1">
                 <a:solidFill>
                   <a:srgbClr val="007F86"/>
@@ -2268,6 +2279,7 @@
           <a:lstStyle xmlns:a="http://schemas.openxmlformats.org/drawingml/2006/main"/>
           <a:p xmlns:a="http://schemas.openxmlformats.org/drawingml/2006/main">
             <a:pPr algn="l">
+              <a:buNone/>
               <a:defRPr sz="2250" b="1">
                 <a:solidFill>
                   <a:srgbClr val="17313E"/>
@@ -2325,6 +2337,7 @@
           <a:lstStyle xmlns:a="http://schemas.openxmlformats.org/drawingml/2006/main"/>
           <a:p xmlns:a="http://schemas.openxmlformats.org/drawingml/2006/main">
             <a:pPr algn="l">
+              <a:buNone/>
               <a:defRPr sz="1500" b="0">
                 <a:solidFill>
                   <a:srgbClr val="45606C"/>
@@ -2377,1067 +2390,28 @@
       <p:grpSpPr>
         <a:xfrm xmlns:a="http://schemas.openxmlformats.org/drawingml/2006/main"/>
       </p:grpSpPr>
-      <p:sp>
-        <p:nvSpPr>
-          <p:cNvPr id="18" name="">
-            <a:extLst xmlns:a="http://schemas.openxmlformats.org/drawingml/2006/main">
-              <a:ext uri="{FF2B5EF4-FFF2-40B4-BE49-F238E27FC236}">
-                <a16:creationId xmlns:a16="http://schemas.microsoft.com/office/drawing/2014/main" id="{9B62D834-DD9C-46F8-A412-4D4E8D8C73A6}"/>
-              </a:ext>
-            </a:extLst>
-          </p:cNvPr>
-          <p:cNvSpPr>
-            <a:spLocks xmlns:a="http://schemas.openxmlformats.org/drawingml/2006/main" noGrp="1"/>
-          </p:cNvSpPr>
-          <p:nvPr/>
-        </p:nvSpPr>
-        <p:spPr>
-          <a:xfrm xmlns:a="http://schemas.openxmlformats.org/drawingml/2006/main">
-            <a:off x="647700" y="400050"/>
-            <a:ext cx="10896600" cy="685800"/>
-          </a:xfrm>
-          <a:prstGeom xmlns:a="http://schemas.openxmlformats.org/drawingml/2006/main" prst="rect">
-            <a:avLst/>
-          </a:prstGeom>
-          <a:noFill xmlns:a="http://schemas.openxmlformats.org/drawingml/2006/main"/>
-          <a:ln xmlns:a="http://schemas.openxmlformats.org/drawingml/2006/main" w="0">
-            <a:noFill/>
-          </a:ln>
-        </p:spPr>
-        <p:txBody>
-          <a:bodyPr xmlns:a="http://schemas.openxmlformats.org/drawingml/2006/main" lIns="0" tIns="0" rIns="0" bIns="0" anchor="ctr">
-            <a:noAutofit/>
-          </a:bodyPr>
-          <a:lstStyle xmlns:a="http://schemas.openxmlformats.org/drawingml/2006/main"/>
-          <a:p xmlns:a="http://schemas.openxmlformats.org/drawingml/2006/main">
-            <a:pPr algn="l">
-              <a:defRPr sz="3150" b="1">
-                <a:solidFill>
-                  <a:srgbClr val="17313E"/>
-                </a:solidFill>
-                <a:latin typeface="Arial Unicode MS"/>
-                <a:ea typeface="Arial Unicode MS"/>
-                <a:cs typeface="Arial Unicode MS"/>
-              </a:defRPr>
-            </a:pPr>
-            <a:r>
-              <a:rPr sz="3150" b="1">
-                <a:solidFill>
-                  <a:srgbClr val="17313E"/>
-                </a:solidFill>
-                <a:latin typeface="Arial Unicode MS"/>
-                <a:ea typeface="Arial Unicode MS"/>
-                <a:cs typeface="Arial Unicode MS"/>
-              </a:rPr>
-              <a:t>μT-Kernel 3.0を2つのコアで動かす</a:t>
-            </a:r>
-          </a:p>
-        </p:txBody>
-      </p:sp>
-      <p:sp>
-        <p:nvSpPr>
-          <p:cNvPr id="2" name="">
-            <a:extLst xmlns:a="http://schemas.openxmlformats.org/drawingml/2006/main">
-              <a:ext uri="{FF2B5EF4-FFF2-40B4-BE49-F238E27FC236}">
-                <a16:creationId xmlns:a16="http://schemas.microsoft.com/office/drawing/2014/main" id="{7316729B-41C6-4351-97C7-DB0A9951CEA6}"/>
-              </a:ext>
-            </a:extLst>
-          </p:cNvPr>
-          <p:cNvSpPr>
-            <a:spLocks xmlns:a="http://schemas.openxmlformats.org/drawingml/2006/main" noGrp="1"/>
-          </p:cNvSpPr>
-          <p:nvPr/>
-        </p:nvSpPr>
-        <p:spPr>
-          <a:xfrm xmlns:a="http://schemas.openxmlformats.org/drawingml/2006/main">
-            <a:off x="619125" y="1857375"/>
-            <a:ext cx="2400300" cy="2714625"/>
-          </a:xfrm>
-          <a:prstGeom xmlns:a="http://schemas.openxmlformats.org/drawingml/2006/main" prst="roundRect">
-            <a:avLst>
-              <a:gd name="adj" fmla="val 3175"/>
-            </a:avLst>
-          </a:prstGeom>
-          <a:solidFill xmlns:a="http://schemas.openxmlformats.org/drawingml/2006/main">
-            <a:srgbClr val="FFFFFF"/>
-          </a:solidFill>
-          <a:ln xmlns:a="http://schemas.openxmlformats.org/drawingml/2006/main" w="19050">
-            <a:solidFill>
-              <a:srgbClr val="9FB6B8"/>
-            </a:solidFill>
-          </a:ln>
-        </p:spPr>
-      </p:sp>
-      <p:sp>
-        <p:nvSpPr>
-          <p:cNvPr id="3" name="">
-            <a:extLst xmlns:a="http://schemas.openxmlformats.org/drawingml/2006/main">
-              <a:ext uri="{FF2B5EF4-FFF2-40B4-BE49-F238E27FC236}">
-                <a16:creationId xmlns:a16="http://schemas.microsoft.com/office/drawing/2014/main" id="{5DCA66DD-E1DD-41FD-8B0D-1B961D889B7B}"/>
-              </a:ext>
-            </a:extLst>
-          </p:cNvPr>
-          <p:cNvSpPr>
-            <a:spLocks xmlns:a="http://schemas.openxmlformats.org/drawingml/2006/main" noGrp="1"/>
-          </p:cNvSpPr>
-          <p:nvPr/>
-        </p:nvSpPr>
-        <p:spPr>
-          <a:xfrm xmlns:a="http://schemas.openxmlformats.org/drawingml/2006/main">
-            <a:off x="790575" y="2000250"/>
-            <a:ext cx="2057400" cy="495300"/>
-          </a:xfrm>
-          <a:prstGeom xmlns:a="http://schemas.openxmlformats.org/drawingml/2006/main" prst="rect">
-            <a:avLst/>
-          </a:prstGeom>
-          <a:noFill xmlns:a="http://schemas.openxmlformats.org/drawingml/2006/main"/>
-          <a:ln xmlns:a="http://schemas.openxmlformats.org/drawingml/2006/main" w="0">
-            <a:noFill/>
-          </a:ln>
-        </p:spPr>
-        <p:txBody>
-          <a:bodyPr xmlns:a="http://schemas.openxmlformats.org/drawingml/2006/main" lIns="0" tIns="0" rIns="0" bIns="0" anchor="ctr">
-            <a:noAutofit/>
-          </a:bodyPr>
-          <a:lstStyle xmlns:a="http://schemas.openxmlformats.org/drawingml/2006/main"/>
-          <a:p xmlns:a="http://schemas.openxmlformats.org/drawingml/2006/main">
-            <a:pPr algn="l">
-              <a:defRPr sz="2100" b="1">
-                <a:solidFill>
-                  <a:srgbClr val="007F86"/>
-                </a:solidFill>
-                <a:latin typeface="Arial Unicode MS"/>
-                <a:ea typeface="Arial Unicode MS"/>
-                <a:cs typeface="Arial Unicode MS"/>
-              </a:defRPr>
-            </a:pPr>
-            <a:r>
-              <a:rPr sz="2100" b="1">
-                <a:solidFill>
-                  <a:srgbClr val="007F86"/>
-                </a:solidFill>
-                <a:latin typeface="Arial Unicode MS"/>
-                <a:ea typeface="Arial Unicode MS"/>
-                <a:cs typeface="Arial Unicode MS"/>
-              </a:rPr>
-              <a:t>音を捉える</a:t>
-            </a:r>
-          </a:p>
-        </p:txBody>
-      </p:sp>
-      <p:sp>
-        <p:nvSpPr>
-          <p:cNvPr id="4" name="">
-            <a:extLst xmlns:a="http://schemas.openxmlformats.org/drawingml/2006/main">
-              <a:ext uri="{FF2B5EF4-FFF2-40B4-BE49-F238E27FC236}">
-                <a16:creationId xmlns:a16="http://schemas.microsoft.com/office/drawing/2014/main" id="{6DA73E2C-775A-4EDC-ACF9-B5FB258F10C5}"/>
-              </a:ext>
-            </a:extLst>
-          </p:cNvPr>
-          <p:cNvSpPr>
-            <a:spLocks xmlns:a="http://schemas.openxmlformats.org/drawingml/2006/main" noGrp="1"/>
-          </p:cNvSpPr>
-          <p:nvPr/>
-        </p:nvSpPr>
-        <p:spPr>
-          <a:xfrm xmlns:a="http://schemas.openxmlformats.org/drawingml/2006/main">
-            <a:off x="790575" y="2667000"/>
-            <a:ext cx="2057400" cy="1028700"/>
-          </a:xfrm>
-          <a:prstGeom xmlns:a="http://schemas.openxmlformats.org/drawingml/2006/main" prst="rect">
-            <a:avLst/>
-          </a:prstGeom>
-          <a:noFill xmlns:a="http://schemas.openxmlformats.org/drawingml/2006/main"/>
-          <a:ln xmlns:a="http://schemas.openxmlformats.org/drawingml/2006/main" w="0">
-            <a:noFill/>
-          </a:ln>
-        </p:spPr>
-        <p:txBody>
-          <a:bodyPr xmlns:a="http://schemas.openxmlformats.org/drawingml/2006/main" lIns="0" tIns="0" rIns="0" bIns="0" anchor="ctr">
-            <a:noAutofit/>
-          </a:bodyPr>
-          <a:lstStyle xmlns:a="http://schemas.openxmlformats.org/drawingml/2006/main"/>
-          <a:p xmlns:a="http://schemas.openxmlformats.org/drawingml/2006/main">
-            <a:pPr algn="l">
-              <a:defRPr sz="1725" b="0">
-                <a:solidFill>
-                  <a:srgbClr val="17313E"/>
-                </a:solidFill>
-                <a:latin typeface="Arial Unicode MS"/>
-                <a:ea typeface="Arial Unicode MS"/>
-                <a:cs typeface="Arial Unicode MS"/>
-              </a:defRPr>
-            </a:pPr>
-            <a:r>
-              <a:rPr sz="1725" b="0">
-                <a:solidFill>
-                  <a:srgbClr val="17313E"/>
-                </a:solidFill>
-                <a:latin typeface="Arial Unicode MS"/>
-                <a:ea typeface="Arial Unicode MS"/>
-                <a:cs typeface="Arial Unicode MS"/>
-              </a:rPr>
-              <a:t>XVF3800</a:t>
-            </a:r>
-          </a:p>
-          <a:p xmlns:a="http://schemas.openxmlformats.org/drawingml/2006/main">
-            <a:pPr algn="l">
-              <a:defRPr sz="1725" b="0">
-                <a:solidFill>
-                  <a:srgbClr val="17313E"/>
-                </a:solidFill>
-                <a:latin typeface="Arial Unicode MS"/>
-                <a:ea typeface="Arial Unicode MS"/>
-                <a:cs typeface="Arial Unicode MS"/>
-              </a:defRPr>
-            </a:pPr>
-            <a:r>
-              <a:rPr sz="1725" b="0">
-                <a:solidFill>
-                  <a:srgbClr val="17313E"/>
-                </a:solidFill>
-                <a:latin typeface="Arial Unicode MS"/>
-                <a:ea typeface="Arial Unicode MS"/>
-                <a:cs typeface="Arial Unicode MS"/>
-              </a:rPr>
-              <a:t>4マイクで方位を測る</a:t>
-            </a:r>
-          </a:p>
-        </p:txBody>
-      </p:sp>
-      <p:sp>
-        <p:nvSpPr>
-          <p:cNvPr id="5" name="">
-            <a:extLst xmlns:a="http://schemas.openxmlformats.org/drawingml/2006/main">
-              <a:ext uri="{FF2B5EF4-FFF2-40B4-BE49-F238E27FC236}">
-                <a16:creationId xmlns:a16="http://schemas.microsoft.com/office/drawing/2014/main" id="{628F511D-247A-405E-97D2-D503B4119B8B}"/>
-              </a:ext>
-            </a:extLst>
-          </p:cNvPr>
-          <p:cNvSpPr>
-            <a:spLocks xmlns:a="http://schemas.openxmlformats.org/drawingml/2006/main" noGrp="1"/>
-          </p:cNvSpPr>
-          <p:nvPr/>
-        </p:nvSpPr>
-        <p:spPr>
-          <a:xfrm xmlns:a="http://schemas.openxmlformats.org/drawingml/2006/main">
-            <a:off x="790575" y="3686175"/>
-            <a:ext cx="2057400" cy="762000"/>
-          </a:xfrm>
-          <a:prstGeom xmlns:a="http://schemas.openxmlformats.org/drawingml/2006/main" prst="rect">
-            <a:avLst/>
-          </a:prstGeom>
-          <a:noFill xmlns:a="http://schemas.openxmlformats.org/drawingml/2006/main"/>
-          <a:ln xmlns:a="http://schemas.openxmlformats.org/drawingml/2006/main" w="0">
-            <a:noFill/>
-          </a:ln>
-        </p:spPr>
-        <p:txBody>
-          <a:bodyPr xmlns:a="http://schemas.openxmlformats.org/drawingml/2006/main" lIns="0" tIns="0" rIns="0" bIns="0" anchor="ctr">
-            <a:noAutofit/>
-          </a:bodyPr>
-          <a:lstStyle xmlns:a="http://schemas.openxmlformats.org/drawingml/2006/main"/>
-          <a:p xmlns:a="http://schemas.openxmlformats.org/drawingml/2006/main">
-            <a:pPr algn="l">
-              <a:defRPr sz="1575" b="0">
-                <a:solidFill>
-                  <a:srgbClr val="45606C"/>
-                </a:solidFill>
-                <a:latin typeface="Arial Unicode MS"/>
-                <a:ea typeface="Arial Unicode MS"/>
-                <a:cs typeface="Arial Unicode MS"/>
-              </a:defRPr>
-            </a:pPr>
-            <a:r>
-              <a:rPr sz="1575" b="0">
-                <a:solidFill>
-                  <a:srgbClr val="45606C"/>
-                </a:solidFill>
-                <a:latin typeface="Arial Unicode MS"/>
-                <a:ea typeface="Arial Unicode MS"/>
-                <a:cs typeface="Arial Unicode MS"/>
-              </a:rPr>
-              <a:t>XIAO ESP32-S3</a:t>
-            </a:r>
-          </a:p>
-          <a:p xmlns:a="http://schemas.openxmlformats.org/drawingml/2006/main">
-            <a:pPr algn="l">
-              <a:defRPr sz="1575" b="0">
-                <a:solidFill>
-                  <a:srgbClr val="45606C"/>
-                </a:solidFill>
-                <a:latin typeface="Arial Unicode MS"/>
-                <a:ea typeface="Arial Unicode MS"/>
-                <a:cs typeface="Arial Unicode MS"/>
-              </a:defRPr>
-            </a:pPr>
-            <a:r>
-              <a:rPr sz="1575" b="0">
-                <a:solidFill>
-                  <a:srgbClr val="45606C"/>
-                </a:solidFill>
-                <a:latin typeface="Arial Unicode MS"/>
-                <a:ea typeface="Arial Unicode MS"/>
-                <a:cs typeface="Arial Unicode MS"/>
-              </a:rPr>
-              <a:t>音響特徴量を抽出</a:t>
-            </a:r>
-          </a:p>
-        </p:txBody>
-      </p:sp>
-      <p:sp>
-        <p:nvSpPr>
-          <p:cNvPr id="6" name="">
-            <a:extLst xmlns:a="http://schemas.openxmlformats.org/drawingml/2006/main">
-              <a:ext uri="{FF2B5EF4-FFF2-40B4-BE49-F238E27FC236}">
-                <a16:creationId xmlns:a16="http://schemas.microsoft.com/office/drawing/2014/main" id="{79377820-46E9-4F0B-A779-7F89F55932B8}"/>
-              </a:ext>
-            </a:extLst>
-          </p:cNvPr>
-          <p:cNvSpPr>
-            <a:spLocks xmlns:a="http://schemas.openxmlformats.org/drawingml/2006/main" noGrp="1"/>
-          </p:cNvSpPr>
-          <p:nvPr/>
-        </p:nvSpPr>
-        <p:spPr>
-          <a:xfrm xmlns:a="http://schemas.openxmlformats.org/drawingml/2006/main">
-            <a:off x="3114675" y="2847975"/>
-            <a:ext cx="495300" cy="619125"/>
-          </a:xfrm>
-          <a:prstGeom xmlns:a="http://schemas.openxmlformats.org/drawingml/2006/main" prst="rect">
-            <a:avLst/>
-          </a:prstGeom>
-          <a:noFill xmlns:a="http://schemas.openxmlformats.org/drawingml/2006/main"/>
-          <a:ln xmlns:a="http://schemas.openxmlformats.org/drawingml/2006/main" w="0">
-            <a:noFill/>
-          </a:ln>
-        </p:spPr>
-        <p:txBody>
-          <a:bodyPr xmlns:a="http://schemas.openxmlformats.org/drawingml/2006/main" lIns="0" tIns="0" rIns="0" bIns="0" anchor="ctr">
-            <a:noAutofit/>
-          </a:bodyPr>
-          <a:lstStyle xmlns:a="http://schemas.openxmlformats.org/drawingml/2006/main"/>
-          <a:p xmlns:a="http://schemas.openxmlformats.org/drawingml/2006/main">
-            <a:pPr algn="ctr">
-              <a:defRPr sz="3150" b="1">
-                <a:solidFill>
-                  <a:srgbClr val="007F86"/>
-                </a:solidFill>
-                <a:latin typeface="Arial Unicode MS"/>
-                <a:ea typeface="Arial Unicode MS"/>
-                <a:cs typeface="Arial Unicode MS"/>
-              </a:defRPr>
-            </a:pPr>
-            <a:r>
-              <a:rPr sz="3150" b="1">
-                <a:solidFill>
-                  <a:srgbClr val="007F86"/>
-                </a:solidFill>
-                <a:latin typeface="Arial Unicode MS"/>
-                <a:ea typeface="Arial Unicode MS"/>
-                <a:cs typeface="Arial Unicode MS"/>
-              </a:rPr>
-              <a:t>→</a:t>
-            </a:r>
-          </a:p>
-        </p:txBody>
-      </p:sp>
-      <p:sp>
-        <p:nvSpPr>
-          <p:cNvPr id="7" name="">
-            <a:extLst xmlns:a="http://schemas.openxmlformats.org/drawingml/2006/main">
-              <a:ext uri="{FF2B5EF4-FFF2-40B4-BE49-F238E27FC236}">
-                <a16:creationId xmlns:a16="http://schemas.microsoft.com/office/drawing/2014/main" id="{E3697354-2258-456A-B7A3-928A3CCF1BD3}"/>
-              </a:ext>
-            </a:extLst>
-          </p:cNvPr>
-          <p:cNvSpPr>
-            <a:spLocks xmlns:a="http://schemas.openxmlformats.org/drawingml/2006/main" noGrp="1"/>
-          </p:cNvSpPr>
-          <p:nvPr/>
-        </p:nvSpPr>
-        <p:spPr>
-          <a:xfrm xmlns:a="http://schemas.openxmlformats.org/drawingml/2006/main">
-            <a:off x="3667125" y="1857375"/>
-            <a:ext cx="2905125" cy="2714625"/>
-          </a:xfrm>
-          <a:prstGeom xmlns:a="http://schemas.openxmlformats.org/drawingml/2006/main" prst="roundRect">
-            <a:avLst>
-              <a:gd name="adj" fmla="val 2807"/>
-            </a:avLst>
-          </a:prstGeom>
-          <a:solidFill xmlns:a="http://schemas.openxmlformats.org/drawingml/2006/main">
-            <a:srgbClr val="E6F0EE"/>
-          </a:solidFill>
-          <a:ln xmlns:a="http://schemas.openxmlformats.org/drawingml/2006/main" w="19050">
-            <a:solidFill>
-              <a:srgbClr val="9FB6B8"/>
-            </a:solidFill>
-          </a:ln>
-        </p:spPr>
-      </p:sp>
-      <p:sp>
-        <p:nvSpPr>
-          <p:cNvPr id="8" name="">
-            <a:extLst xmlns:a="http://schemas.openxmlformats.org/drawingml/2006/main">
-              <a:ext uri="{FF2B5EF4-FFF2-40B4-BE49-F238E27FC236}">
-                <a16:creationId xmlns:a16="http://schemas.microsoft.com/office/drawing/2014/main" id="{7AA6F1E4-476A-4B22-AEE9-0B81B7530716}"/>
-              </a:ext>
-            </a:extLst>
-          </p:cNvPr>
-          <p:cNvSpPr>
-            <a:spLocks xmlns:a="http://schemas.openxmlformats.org/drawingml/2006/main" noGrp="1"/>
-          </p:cNvSpPr>
-          <p:nvPr/>
-        </p:nvSpPr>
-        <p:spPr>
-          <a:xfrm xmlns:a="http://schemas.openxmlformats.org/drawingml/2006/main">
-            <a:off x="3905250" y="2000250"/>
-            <a:ext cx="2428875" cy="495300"/>
-          </a:xfrm>
-          <a:prstGeom xmlns:a="http://schemas.openxmlformats.org/drawingml/2006/main" prst="rect">
-            <a:avLst/>
-          </a:prstGeom>
-          <a:noFill xmlns:a="http://schemas.openxmlformats.org/drawingml/2006/main"/>
-          <a:ln xmlns:a="http://schemas.openxmlformats.org/drawingml/2006/main" w="0">
-            <a:noFill/>
-          </a:ln>
-        </p:spPr>
-        <p:txBody>
-          <a:bodyPr xmlns:a="http://schemas.openxmlformats.org/drawingml/2006/main" lIns="0" tIns="0" rIns="0" bIns="0" anchor="ctr">
-            <a:noAutofit/>
-          </a:bodyPr>
-          <a:lstStyle xmlns:a="http://schemas.openxmlformats.org/drawingml/2006/main"/>
-          <a:p xmlns:a="http://schemas.openxmlformats.org/drawingml/2006/main">
-            <a:pPr algn="l">
-              <a:defRPr sz="2025" b="1">
-                <a:solidFill>
-                  <a:srgbClr val="007F86"/>
-                </a:solidFill>
-                <a:latin typeface="Arial Unicode MS"/>
-                <a:ea typeface="Arial Unicode MS"/>
-                <a:cs typeface="Arial Unicode MS"/>
-              </a:defRPr>
-            </a:pPr>
-            <a:r>
-              <a:rPr sz="2025" b="1">
-                <a:solidFill>
-                  <a:srgbClr val="007F86"/>
-                </a:solidFill>
-                <a:latin typeface="Arial Unicode MS"/>
-                <a:ea typeface="Arial Unicode MS"/>
-                <a:cs typeface="Arial Unicode MS"/>
-              </a:rPr>
-              <a:t>CPU0  Cortex-M85</a:t>
-            </a:r>
-          </a:p>
-        </p:txBody>
-      </p:sp>
-      <p:sp>
-        <p:nvSpPr>
-          <p:cNvPr id="9" name="">
-            <a:extLst xmlns:a="http://schemas.openxmlformats.org/drawingml/2006/main">
-              <a:ext uri="{FF2B5EF4-FFF2-40B4-BE49-F238E27FC236}">
-                <a16:creationId xmlns:a16="http://schemas.microsoft.com/office/drawing/2014/main" id="{FEBD40F8-4668-4D74-A5A5-489CCB739217}"/>
-              </a:ext>
-            </a:extLst>
-          </p:cNvPr>
-          <p:cNvSpPr>
-            <a:spLocks xmlns:a="http://schemas.openxmlformats.org/drawingml/2006/main" noGrp="1"/>
-          </p:cNvSpPr>
-          <p:nvPr/>
-        </p:nvSpPr>
-        <p:spPr>
-          <a:xfrm xmlns:a="http://schemas.openxmlformats.org/drawingml/2006/main">
-            <a:off x="3905250" y="2647950"/>
-            <a:ext cx="2428875" cy="1543050"/>
-          </a:xfrm>
-          <a:prstGeom xmlns:a="http://schemas.openxmlformats.org/drawingml/2006/main" prst="rect">
-            <a:avLst/>
-          </a:prstGeom>
-          <a:noFill xmlns:a="http://schemas.openxmlformats.org/drawingml/2006/main"/>
-          <a:ln xmlns:a="http://schemas.openxmlformats.org/drawingml/2006/main" w="0">
-            <a:noFill/>
-          </a:ln>
-        </p:spPr>
-        <p:txBody>
-          <a:bodyPr xmlns:a="http://schemas.openxmlformats.org/drawingml/2006/main" lIns="0" tIns="0" rIns="0" bIns="0" anchor="ctr">
-            <a:noAutofit/>
-          </a:bodyPr>
-          <a:lstStyle xmlns:a="http://schemas.openxmlformats.org/drawingml/2006/main"/>
-          <a:p xmlns:a="http://schemas.openxmlformats.org/drawingml/2006/main">
-            <a:pPr algn="l">
-              <a:defRPr sz="1650" b="0">
-                <a:solidFill>
-                  <a:srgbClr val="17313E"/>
-                </a:solidFill>
-                <a:latin typeface="Arial Unicode MS"/>
-                <a:ea typeface="Arial Unicode MS"/>
-                <a:cs typeface="Arial Unicode MS"/>
-              </a:defRPr>
-            </a:pPr>
-            <a:r>
-              <a:rPr sz="1650" b="0">
-                <a:solidFill>
-                  <a:srgbClr val="17313E"/>
-                </a:solidFill>
-                <a:latin typeface="Arial Unicode MS"/>
-                <a:ea typeface="Arial Unicode MS"/>
-                <a:cs typeface="Arial Unicode MS"/>
-              </a:rPr>
-              <a:t>μT-Kernel 3.0</a:t>
-            </a:r>
-          </a:p>
-          <a:p xmlns:a="http://schemas.openxmlformats.org/drawingml/2006/main">
-            <a:pPr algn="l">
-              <a:defRPr sz="1650" b="0">
-                <a:solidFill>
-                  <a:srgbClr val="17313E"/>
-                </a:solidFill>
-                <a:latin typeface="Arial Unicode MS"/>
-                <a:ea typeface="Arial Unicode MS"/>
-                <a:cs typeface="Arial Unicode MS"/>
-              </a:defRPr>
-            </a:pPr>
-            <a:r>
-              <a:rPr sz="1650" b="0">
-                <a:solidFill>
-                  <a:srgbClr val="17313E"/>
-                </a:solidFill>
-                <a:latin typeface="Arial Unicode MS"/>
-                <a:ea typeface="Arial Unicode MS"/>
-                <a:cs typeface="Arial Unicode MS"/>
-              </a:rPr>
-              <a:t>音の識別・方位追従</a:t>
-            </a:r>
-          </a:p>
-          <a:p xmlns:a="http://schemas.openxmlformats.org/drawingml/2006/main">
-            <a:pPr algn="l">
-              <a:defRPr sz="1650" b="0">
-                <a:solidFill>
-                  <a:srgbClr val="17313E"/>
-                </a:solidFill>
-                <a:latin typeface="Arial Unicode MS"/>
-                <a:ea typeface="Arial Unicode MS"/>
-                <a:cs typeface="Arial Unicode MS"/>
-              </a:defRPr>
-            </a:pPr>
-            <a:r>
-              <a:rPr sz="1650" b="0">
-                <a:solidFill>
-                  <a:srgbClr val="17313E"/>
-                </a:solidFill>
-                <a:latin typeface="Arial Unicode MS"/>
-                <a:ea typeface="Arial Unicode MS"/>
-                <a:cs typeface="Arial Unicode MS"/>
-              </a:rPr>
-              <a:t>ToF / IMU・TFLM推論</a:t>
-            </a:r>
-          </a:p>
-        </p:txBody>
-      </p:sp>
-      <p:sp>
-        <p:nvSpPr>
-          <p:cNvPr id="10" name="">
-            <a:extLst xmlns:a="http://schemas.openxmlformats.org/drawingml/2006/main">
-              <a:ext uri="{FF2B5EF4-FFF2-40B4-BE49-F238E27FC236}">
-                <a16:creationId xmlns:a16="http://schemas.microsoft.com/office/drawing/2014/main" id="{E493D79F-AA20-4EBD-AAD7-707D55FEA19B}"/>
-              </a:ext>
-            </a:extLst>
-          </p:cNvPr>
-          <p:cNvSpPr>
-            <a:spLocks xmlns:a="http://schemas.openxmlformats.org/drawingml/2006/main" noGrp="1"/>
-          </p:cNvSpPr>
-          <p:nvPr/>
-        </p:nvSpPr>
-        <p:spPr>
-          <a:xfrm xmlns:a="http://schemas.openxmlformats.org/drawingml/2006/main">
-            <a:off x="6619875" y="2847975"/>
-            <a:ext cx="495300" cy="619125"/>
-          </a:xfrm>
-          <a:prstGeom xmlns:a="http://schemas.openxmlformats.org/drawingml/2006/main" prst="rect">
-            <a:avLst/>
-          </a:prstGeom>
-          <a:noFill xmlns:a="http://schemas.openxmlformats.org/drawingml/2006/main"/>
-          <a:ln xmlns:a="http://schemas.openxmlformats.org/drawingml/2006/main" w="0">
-            <a:noFill/>
-          </a:ln>
-        </p:spPr>
-        <p:txBody>
-          <a:bodyPr xmlns:a="http://schemas.openxmlformats.org/drawingml/2006/main" lIns="0" tIns="0" rIns="0" bIns="0" anchor="ctr">
-            <a:noAutofit/>
-          </a:bodyPr>
-          <a:lstStyle xmlns:a="http://schemas.openxmlformats.org/drawingml/2006/main"/>
-          <a:p xmlns:a="http://schemas.openxmlformats.org/drawingml/2006/main">
-            <a:pPr algn="ctr">
-              <a:defRPr sz="3150" b="1">
-                <a:solidFill>
-                  <a:srgbClr val="007F86"/>
-                </a:solidFill>
-                <a:latin typeface="Arial Unicode MS"/>
-                <a:ea typeface="Arial Unicode MS"/>
-                <a:cs typeface="Arial Unicode MS"/>
-              </a:defRPr>
-            </a:pPr>
-            <a:r>
-              <a:rPr sz="3150" b="1">
-                <a:solidFill>
-                  <a:srgbClr val="007F86"/>
-                </a:solidFill>
-                <a:latin typeface="Arial Unicode MS"/>
-                <a:ea typeface="Arial Unicode MS"/>
-                <a:cs typeface="Arial Unicode MS"/>
-              </a:rPr>
-              <a:t>→</a:t>
-            </a:r>
-          </a:p>
-        </p:txBody>
-      </p:sp>
-      <p:sp>
-        <p:nvSpPr>
-          <p:cNvPr id="11" name="">
-            <a:extLst xmlns:a="http://schemas.openxmlformats.org/drawingml/2006/main">
-              <a:ext uri="{FF2B5EF4-FFF2-40B4-BE49-F238E27FC236}">
-                <a16:creationId xmlns:a16="http://schemas.microsoft.com/office/drawing/2014/main" id="{338DBE6F-BEA5-4A5D-8B40-2DC5C4ED7088}"/>
-              </a:ext>
-            </a:extLst>
-          </p:cNvPr>
-          <p:cNvSpPr>
-            <a:spLocks xmlns:a="http://schemas.openxmlformats.org/drawingml/2006/main" noGrp="1"/>
-          </p:cNvSpPr>
-          <p:nvPr/>
-        </p:nvSpPr>
-        <p:spPr>
-          <a:xfrm xmlns:a="http://schemas.openxmlformats.org/drawingml/2006/main">
-            <a:off x="7162800" y="1857375"/>
-            <a:ext cx="2590800" cy="2714625"/>
-          </a:xfrm>
-          <a:prstGeom xmlns:a="http://schemas.openxmlformats.org/drawingml/2006/main" prst="roundRect">
-            <a:avLst>
-              <a:gd name="adj" fmla="val 2941"/>
-            </a:avLst>
-          </a:prstGeom>
-          <a:solidFill xmlns:a="http://schemas.openxmlformats.org/drawingml/2006/main">
-            <a:srgbClr val="FFFFFF"/>
-          </a:solidFill>
-          <a:ln xmlns:a="http://schemas.openxmlformats.org/drawingml/2006/main" w="19050">
-            <a:solidFill>
-              <a:srgbClr val="9FB6B8"/>
-            </a:solidFill>
-          </a:ln>
-        </p:spPr>
-      </p:sp>
-      <p:sp>
-        <p:nvSpPr>
-          <p:cNvPr id="12" name="">
-            <a:extLst xmlns:a="http://schemas.openxmlformats.org/drawingml/2006/main">
-              <a:ext uri="{FF2B5EF4-FFF2-40B4-BE49-F238E27FC236}">
-                <a16:creationId xmlns:a16="http://schemas.microsoft.com/office/drawing/2014/main" id="{EE28589A-37DA-43E1-8968-5E6A4AB07BC0}"/>
-              </a:ext>
-            </a:extLst>
-          </p:cNvPr>
-          <p:cNvSpPr>
-            <a:spLocks xmlns:a="http://schemas.openxmlformats.org/drawingml/2006/main" noGrp="1"/>
-          </p:cNvSpPr>
-          <p:nvPr/>
-        </p:nvSpPr>
-        <p:spPr>
-          <a:xfrm xmlns:a="http://schemas.openxmlformats.org/drawingml/2006/main">
-            <a:off x="7381875" y="2000250"/>
-            <a:ext cx="2181225" cy="495300"/>
-          </a:xfrm>
-          <a:prstGeom xmlns:a="http://schemas.openxmlformats.org/drawingml/2006/main" prst="rect">
-            <a:avLst/>
-          </a:prstGeom>
-          <a:noFill xmlns:a="http://schemas.openxmlformats.org/drawingml/2006/main"/>
-          <a:ln xmlns:a="http://schemas.openxmlformats.org/drawingml/2006/main" w="0">
-            <a:noFill/>
-          </a:ln>
-        </p:spPr>
-        <p:txBody>
-          <a:bodyPr xmlns:a="http://schemas.openxmlformats.org/drawingml/2006/main" lIns="0" tIns="0" rIns="0" bIns="0" anchor="ctr">
-            <a:noAutofit/>
-          </a:bodyPr>
-          <a:lstStyle xmlns:a="http://schemas.openxmlformats.org/drawingml/2006/main"/>
-          <a:p xmlns:a="http://schemas.openxmlformats.org/drawingml/2006/main">
-            <a:pPr algn="l">
-              <a:defRPr sz="2025" b="1">
-                <a:solidFill>
-                  <a:srgbClr val="007F86"/>
-                </a:solidFill>
-                <a:latin typeface="Arial Unicode MS"/>
-                <a:ea typeface="Arial Unicode MS"/>
-                <a:cs typeface="Arial Unicode MS"/>
-              </a:defRPr>
-            </a:pPr>
-            <a:r>
-              <a:rPr sz="2025" b="1">
-                <a:solidFill>
-                  <a:srgbClr val="007F86"/>
-                </a:solidFill>
-                <a:latin typeface="Arial Unicode MS"/>
-                <a:ea typeface="Arial Unicode MS"/>
-                <a:cs typeface="Arial Unicode MS"/>
-              </a:rPr>
-              <a:t>CPU1  Cortex-M33</a:t>
-            </a:r>
-          </a:p>
-        </p:txBody>
-      </p:sp>
-      <p:sp>
-        <p:nvSpPr>
-          <p:cNvPr id="13" name="">
-            <a:extLst xmlns:a="http://schemas.openxmlformats.org/drawingml/2006/main">
-              <a:ext uri="{FF2B5EF4-FFF2-40B4-BE49-F238E27FC236}">
-                <a16:creationId xmlns:a16="http://schemas.microsoft.com/office/drawing/2014/main" id="{38056F1D-BEE2-4E0C-8634-6ABB8ED28A27}"/>
-              </a:ext>
-            </a:extLst>
-          </p:cNvPr>
-          <p:cNvSpPr>
-            <a:spLocks xmlns:a="http://schemas.openxmlformats.org/drawingml/2006/main" noGrp="1"/>
-          </p:cNvSpPr>
-          <p:nvPr/>
-        </p:nvSpPr>
-        <p:spPr>
-          <a:xfrm xmlns:a="http://schemas.openxmlformats.org/drawingml/2006/main">
-            <a:off x="7381875" y="2647950"/>
-            <a:ext cx="2181225" cy="1543050"/>
-          </a:xfrm>
-          <a:prstGeom xmlns:a="http://schemas.openxmlformats.org/drawingml/2006/main" prst="rect">
-            <a:avLst/>
-          </a:prstGeom>
-          <a:noFill xmlns:a="http://schemas.openxmlformats.org/drawingml/2006/main"/>
-          <a:ln xmlns:a="http://schemas.openxmlformats.org/drawingml/2006/main" w="0">
-            <a:noFill/>
-          </a:ln>
-        </p:spPr>
-        <p:txBody>
-          <a:bodyPr xmlns:a="http://schemas.openxmlformats.org/drawingml/2006/main" lIns="0" tIns="0" rIns="0" bIns="0" anchor="ctr">
-            <a:noAutofit/>
-          </a:bodyPr>
-          <a:lstStyle xmlns:a="http://schemas.openxmlformats.org/drawingml/2006/main"/>
-          <a:p xmlns:a="http://schemas.openxmlformats.org/drawingml/2006/main">
-            <a:pPr algn="l">
-              <a:defRPr sz="1650" b="0">
-                <a:solidFill>
-                  <a:srgbClr val="17313E"/>
-                </a:solidFill>
-                <a:latin typeface="Arial Unicode MS"/>
-                <a:ea typeface="Arial Unicode MS"/>
-                <a:cs typeface="Arial Unicode MS"/>
-              </a:defRPr>
-            </a:pPr>
-            <a:r>
-              <a:rPr sz="1650" b="0">
-                <a:solidFill>
-                  <a:srgbClr val="17313E"/>
-                </a:solidFill>
-                <a:latin typeface="Arial Unicode MS"/>
-                <a:ea typeface="Arial Unicode MS"/>
-                <a:cs typeface="Arial Unicode MS"/>
-              </a:rPr>
-              <a:t>μT-Kernel 3.0</a:t>
-            </a:r>
-          </a:p>
-          <a:p xmlns:a="http://schemas.openxmlformats.org/drawingml/2006/main">
-            <a:pPr algn="l">
-              <a:defRPr sz="1650" b="0">
-                <a:solidFill>
-                  <a:srgbClr val="17313E"/>
-                </a:solidFill>
-                <a:latin typeface="Arial Unicode MS"/>
-                <a:ea typeface="Arial Unicode MS"/>
-                <a:cs typeface="Arial Unicode MS"/>
-              </a:defRPr>
-            </a:pPr>
-            <a:r>
-              <a:rPr sz="1650" b="0">
-                <a:solidFill>
-                  <a:srgbClr val="17313E"/>
-                </a:solidFill>
-                <a:latin typeface="Arial Unicode MS"/>
-                <a:ea typeface="Arial Unicode MS"/>
-                <a:cs typeface="Arial Unicode MS"/>
-              </a:rPr>
-              <a:t>1 ms周期の駆動制御</a:t>
-            </a:r>
-          </a:p>
-          <a:p xmlns:a="http://schemas.openxmlformats.org/drawingml/2006/main">
-            <a:pPr algn="l">
-              <a:defRPr sz="1650" b="0">
-                <a:solidFill>
-                  <a:srgbClr val="17313E"/>
-                </a:solidFill>
-                <a:latin typeface="Arial Unicode MS"/>
-                <a:ea typeface="Arial Unicode MS"/>
-                <a:cs typeface="Arial Unicode MS"/>
-              </a:defRPr>
-            </a:pPr>
-            <a:r>
-              <a:rPr sz="1650" b="0">
-                <a:solidFill>
-                  <a:srgbClr val="17313E"/>
-                </a:solidFill>
-                <a:latin typeface="Arial Unicode MS"/>
-                <a:ea typeface="Arial Unicode MS"/>
-                <a:cs typeface="Arial Unicode MS"/>
-              </a:rPr>
-              <a:t>指令途絶で停止</a:t>
-            </a:r>
-          </a:p>
-        </p:txBody>
-      </p:sp>
-      <p:sp>
-        <p:nvSpPr>
-          <p:cNvPr id="14" name="">
-            <a:extLst xmlns:a="http://schemas.openxmlformats.org/drawingml/2006/main">
-              <a:ext uri="{FF2B5EF4-FFF2-40B4-BE49-F238E27FC236}">
-                <a16:creationId xmlns:a16="http://schemas.microsoft.com/office/drawing/2014/main" id="{FE84F847-A811-4272-8448-77F22997C1A6}"/>
-              </a:ext>
-            </a:extLst>
-          </p:cNvPr>
-          <p:cNvSpPr>
-            <a:spLocks xmlns:a="http://schemas.openxmlformats.org/drawingml/2006/main" noGrp="1"/>
-          </p:cNvSpPr>
-          <p:nvPr/>
-        </p:nvSpPr>
-        <p:spPr>
-          <a:xfrm xmlns:a="http://schemas.openxmlformats.org/drawingml/2006/main">
-            <a:off x="9839325" y="2847975"/>
-            <a:ext cx="476250" cy="619125"/>
-          </a:xfrm>
-          <a:prstGeom xmlns:a="http://schemas.openxmlformats.org/drawingml/2006/main" prst="rect">
-            <a:avLst/>
-          </a:prstGeom>
-          <a:noFill xmlns:a="http://schemas.openxmlformats.org/drawingml/2006/main"/>
-          <a:ln xmlns:a="http://schemas.openxmlformats.org/drawingml/2006/main" w="0">
-            <a:noFill/>
-          </a:ln>
-        </p:spPr>
-        <p:txBody>
-          <a:bodyPr xmlns:a="http://schemas.openxmlformats.org/drawingml/2006/main" lIns="0" tIns="0" rIns="0" bIns="0" anchor="ctr">
-            <a:noAutofit/>
-          </a:bodyPr>
-          <a:lstStyle xmlns:a="http://schemas.openxmlformats.org/drawingml/2006/main"/>
-          <a:p xmlns:a="http://schemas.openxmlformats.org/drawingml/2006/main">
-            <a:pPr algn="ctr">
-              <a:defRPr sz="3150" b="1">
-                <a:solidFill>
-                  <a:srgbClr val="007F86"/>
-                </a:solidFill>
-                <a:latin typeface="Arial Unicode MS"/>
-                <a:ea typeface="Arial Unicode MS"/>
-                <a:cs typeface="Arial Unicode MS"/>
-              </a:defRPr>
-            </a:pPr>
-            <a:r>
-              <a:rPr sz="3150" b="1">
-                <a:solidFill>
-                  <a:srgbClr val="007F86"/>
-                </a:solidFill>
-                <a:latin typeface="Arial Unicode MS"/>
-                <a:ea typeface="Arial Unicode MS"/>
-                <a:cs typeface="Arial Unicode MS"/>
-              </a:rPr>
-              <a:t>→</a:t>
-            </a:r>
-          </a:p>
-        </p:txBody>
-      </p:sp>
-      <p:sp>
-        <p:nvSpPr>
-          <p:cNvPr id="15" name="">
-            <a:extLst xmlns:a="http://schemas.openxmlformats.org/drawingml/2006/main">
-              <a:ext uri="{FF2B5EF4-FFF2-40B4-BE49-F238E27FC236}">
-                <a16:creationId xmlns:a16="http://schemas.microsoft.com/office/drawing/2014/main" id="{43DE7B34-EAB2-4694-AFB3-D4B1D3217760}"/>
-              </a:ext>
-            </a:extLst>
-          </p:cNvPr>
-          <p:cNvSpPr>
-            <a:spLocks xmlns:a="http://schemas.openxmlformats.org/drawingml/2006/main" noGrp="1"/>
-          </p:cNvSpPr>
-          <p:nvPr/>
-        </p:nvSpPr>
-        <p:spPr>
-          <a:xfrm xmlns:a="http://schemas.openxmlformats.org/drawingml/2006/main">
-            <a:off x="10334625" y="2209800"/>
-            <a:ext cx="1200150" cy="2000250"/>
-          </a:xfrm>
-          <a:prstGeom xmlns:a="http://schemas.openxmlformats.org/drawingml/2006/main" prst="roundRect">
-            <a:avLst>
-              <a:gd name="adj" fmla="val 6349"/>
-            </a:avLst>
-          </a:prstGeom>
-          <a:solidFill xmlns:a="http://schemas.openxmlformats.org/drawingml/2006/main">
-            <a:srgbClr val="FFFFFF"/>
-          </a:solidFill>
-          <a:ln xmlns:a="http://schemas.openxmlformats.org/drawingml/2006/main" w="19050">
-            <a:solidFill>
-              <a:srgbClr val="9FB6B8"/>
-            </a:solidFill>
-          </a:ln>
-        </p:spPr>
-      </p:sp>
-      <p:sp>
-        <p:nvSpPr>
-          <p:cNvPr id="16" name="">
-            <a:extLst xmlns:a="http://schemas.openxmlformats.org/drawingml/2006/main">
-              <a:ext uri="{FF2B5EF4-FFF2-40B4-BE49-F238E27FC236}">
-                <a16:creationId xmlns:a16="http://schemas.microsoft.com/office/drawing/2014/main" id="{7AF991AC-5B4C-43D5-AC21-23AA2A44271C}"/>
-              </a:ext>
-            </a:extLst>
-          </p:cNvPr>
-          <p:cNvSpPr>
-            <a:spLocks xmlns:a="http://schemas.openxmlformats.org/drawingml/2006/main" noGrp="1"/>
-          </p:cNvSpPr>
-          <p:nvPr/>
-        </p:nvSpPr>
-        <p:spPr>
-          <a:xfrm xmlns:a="http://schemas.openxmlformats.org/drawingml/2006/main">
-            <a:off x="10429875" y="2400300"/>
-            <a:ext cx="1019175" cy="1524000"/>
-          </a:xfrm>
-          <a:prstGeom xmlns:a="http://schemas.openxmlformats.org/drawingml/2006/main" prst="rect">
-            <a:avLst/>
-          </a:prstGeom>
-          <a:noFill xmlns:a="http://schemas.openxmlformats.org/drawingml/2006/main"/>
-          <a:ln xmlns:a="http://schemas.openxmlformats.org/drawingml/2006/main" w="0">
-            <a:noFill/>
-          </a:ln>
-        </p:spPr>
-        <p:txBody>
-          <a:bodyPr xmlns:a="http://schemas.openxmlformats.org/drawingml/2006/main" lIns="0" tIns="0" rIns="0" bIns="0" anchor="ctr">
-            <a:noAutofit/>
-          </a:bodyPr>
-          <a:lstStyle xmlns:a="http://schemas.openxmlformats.org/drawingml/2006/main"/>
-          <a:p xmlns:a="http://schemas.openxmlformats.org/drawingml/2006/main">
-            <a:pPr algn="ctr">
-              <a:defRPr sz="1575" b="1">
-                <a:solidFill>
-                  <a:srgbClr val="17313E"/>
-                </a:solidFill>
-                <a:latin typeface="Arial Unicode MS"/>
-                <a:ea typeface="Arial Unicode MS"/>
-                <a:cs typeface="Arial Unicode MS"/>
-              </a:defRPr>
-            </a:pPr>
-            <a:r>
-              <a:rPr sz="1575" b="1">
-                <a:solidFill>
-                  <a:srgbClr val="17313E"/>
-                </a:solidFill>
-                <a:latin typeface="Arial Unicode MS"/>
-                <a:ea typeface="Arial Unicode MS"/>
-                <a:cs typeface="Arial Unicode MS"/>
-              </a:rPr>
-              <a:t>車体</a:t>
-            </a:r>
-          </a:p>
-          <a:p xmlns:a="http://schemas.openxmlformats.org/drawingml/2006/main">
-            <a:pPr algn="ctr">
-              <a:defRPr sz="1575" b="1">
-                <a:solidFill>
-                  <a:srgbClr val="17313E"/>
-                </a:solidFill>
-                <a:latin typeface="Arial Unicode MS"/>
-                <a:ea typeface="Arial Unicode MS"/>
-                <a:cs typeface="Arial Unicode MS"/>
-              </a:defRPr>
-            </a:pPr>
-            <a:r>
-              <a:rPr sz="1575" b="1">
-                <a:solidFill>
-                  <a:srgbClr val="17313E"/>
-                </a:solidFill>
-                <a:latin typeface="Arial Unicode MS"/>
-                <a:ea typeface="Arial Unicode MS"/>
-                <a:cs typeface="Arial Unicode MS"/>
-              </a:rPr>
-              <a:t>6輪駆動</a:t>
-            </a:r>
-          </a:p>
-          <a:p xmlns:a="http://schemas.openxmlformats.org/drawingml/2006/main">
-            <a:pPr algn="ctr">
-              <a:defRPr sz="1575" b="1">
-                <a:solidFill>
-                  <a:srgbClr val="17313E"/>
-                </a:solidFill>
-                <a:latin typeface="Arial Unicode MS"/>
-                <a:ea typeface="Arial Unicode MS"/>
-                <a:cs typeface="Arial Unicode MS"/>
-              </a:defRPr>
-            </a:pPr>
-            <a:r>
-              <a:rPr sz="1575" b="1">
-                <a:solidFill>
-                  <a:srgbClr val="17313E"/>
-                </a:solidFill>
-                <a:latin typeface="Arial Unicode MS"/>
-                <a:ea typeface="Arial Unicode MS"/>
-                <a:cs typeface="Arial Unicode MS"/>
-              </a:rPr>
-              <a:t>4輪操舵</a:t>
-            </a:r>
-          </a:p>
-        </p:txBody>
-      </p:sp>
-      <p:sp>
-        <p:nvSpPr>
-          <p:cNvPr id="17" name="">
-            <a:extLst xmlns:a="http://schemas.openxmlformats.org/drawingml/2006/main">
-              <a:ext uri="{FF2B5EF4-FFF2-40B4-BE49-F238E27FC236}">
-                <a16:creationId xmlns:a16="http://schemas.microsoft.com/office/drawing/2014/main" id="{603AB05A-60EE-430A-A423-E0CE43874982}"/>
-              </a:ext>
-            </a:extLst>
-          </p:cNvPr>
-          <p:cNvSpPr>
-            <a:spLocks xmlns:a="http://schemas.openxmlformats.org/drawingml/2006/main" noGrp="1"/>
-          </p:cNvSpPr>
-          <p:nvPr/>
-        </p:nvSpPr>
-        <p:spPr>
-          <a:xfrm xmlns:a="http://schemas.openxmlformats.org/drawingml/2006/main">
-            <a:off x="666750" y="5457825"/>
-            <a:ext cx="10858500" cy="704850"/>
-          </a:xfrm>
-          <a:prstGeom xmlns:a="http://schemas.openxmlformats.org/drawingml/2006/main" prst="rect">
-            <a:avLst/>
-          </a:prstGeom>
-          <a:noFill xmlns:a="http://schemas.openxmlformats.org/drawingml/2006/main"/>
-          <a:ln xmlns:a="http://schemas.openxmlformats.org/drawingml/2006/main" w="0">
-            <a:noFill/>
-          </a:ln>
-        </p:spPr>
-        <p:txBody>
-          <a:bodyPr xmlns:a="http://schemas.openxmlformats.org/drawingml/2006/main" lIns="0" tIns="0" rIns="0" bIns="0" anchor="ctr">
-            <a:noAutofit/>
-          </a:bodyPr>
-          <a:lstStyle xmlns:a="http://schemas.openxmlformats.org/drawingml/2006/main"/>
-          <a:p xmlns:a="http://schemas.openxmlformats.org/drawingml/2006/main">
-            <a:pPr algn="l">
-              <a:defRPr sz="1650" b="0">
-                <a:solidFill>
-                  <a:srgbClr val="45606C"/>
-                </a:solidFill>
-                <a:latin typeface="Arial Unicode MS"/>
-                <a:ea typeface="Arial Unicode MS"/>
-                <a:cs typeface="Arial Unicode MS"/>
-              </a:defRPr>
-            </a:pPr>
-            <a:r>
-              <a:rPr sz="1650" b="0">
-                <a:solidFill>
-                  <a:srgbClr val="45606C"/>
-                </a:solidFill>
-                <a:latin typeface="Arial Unicode MS"/>
-                <a:ea typeface="Arial Unicode MS"/>
-                <a:cs typeface="Arial Unicode MS"/>
-              </a:rPr>
-              <a:t>CPU0とCPU1はHardware FIFOを通じて6つの駆動出力を一括確定します。</a:t>
-            </a:r>
-          </a:p>
-        </p:txBody>
-      </p:sp>
+      <p:pic>
+        <p:nvPicPr>
+          <p:cNvPr id="2" name=""/>
+          <p:cNvPicPr>
+            <a:picLocks xmlns:a="http://schemas.openxmlformats.org/drawingml/2006/main" noChangeAspect="1"/>
+          </p:cNvPicPr>
+          <p:nvPr/>
+        </p:nvPicPr>
+        <p:blipFill>
+          <a:blip xmlns:r="http://schemas.openxmlformats.org/officeDocument/2006/relationships" xmlns:a="http://schemas.openxmlformats.org/drawingml/2006/main" r:embed="R4d06df219a0b45ca"/>
+          <a:stretch xmlns:a="http://schemas.openxmlformats.org/drawingml/2006/main"/>
+        </p:blipFill>
+        <p:spPr>
+          <a:xfrm xmlns:a="http://schemas.openxmlformats.org/drawingml/2006/main">
+            <a:off x="0" y="0"/>
+            <a:ext cx="12192000" cy="6858000"/>
+          </a:xfrm>
+          <a:prstGeom xmlns:a="http://schemas.openxmlformats.org/drawingml/2006/main" prst="rect">
+            <a:avLst/>
+          </a:prstGeom>
+        </p:spPr>
+      </p:pic>
     </p:spTree>
     <p:extLst>
       <p:ext uri="{BB962C8B-B14F-4D97-AF65-F5344CB8AC3E}">
@@ -3501,6 +2475,7 @@
           <a:lstStyle xmlns:a="http://schemas.openxmlformats.org/drawingml/2006/main"/>
           <a:p xmlns:a="http://schemas.openxmlformats.org/drawingml/2006/main">
             <a:pPr algn="l">
+              <a:buNone/>
               <a:defRPr sz="3150" b="1">
                 <a:solidFill>
                   <a:srgbClr val="17313E"/>
@@ -3558,6 +2533,7 @@
           <a:lstStyle xmlns:a="http://schemas.openxmlformats.org/drawingml/2006/main"/>
           <a:p xmlns:a="http://schemas.openxmlformats.org/drawingml/2006/main">
             <a:pPr algn="l">
+              <a:buNone/>
               <a:defRPr sz="2325" b="1">
                 <a:solidFill>
                   <a:srgbClr val="007F86"/>
@@ -3615,6 +2591,7 @@
           <a:lstStyle xmlns:a="http://schemas.openxmlformats.org/drawingml/2006/main"/>
           <a:p xmlns:a="http://schemas.openxmlformats.org/drawingml/2006/main">
             <a:pPr algn="l">
+              <a:buNone/>
               <a:defRPr sz="2175" b="1">
                 <a:solidFill>
                   <a:srgbClr val="17313E"/>
@@ -3672,6 +2649,7 @@
           <a:lstStyle xmlns:a="http://schemas.openxmlformats.org/drawingml/2006/main"/>
           <a:p xmlns:a="http://schemas.openxmlformats.org/drawingml/2006/main">
             <a:pPr algn="l">
+              <a:buNone/>
               <a:defRPr sz="2175" b="1">
                 <a:solidFill>
                   <a:srgbClr val="17313E"/>
@@ -3729,6 +2707,7 @@
           <a:lstStyle xmlns:a="http://schemas.openxmlformats.org/drawingml/2006/main"/>
           <a:p xmlns:a="http://schemas.openxmlformats.org/drawingml/2006/main">
             <a:pPr algn="l">
+              <a:buNone/>
               <a:defRPr sz="1650" b="0">
                 <a:solidFill>
                   <a:srgbClr val="45606C"/>
@@ -3752,6 +2731,7 @@
           </a:p>
           <a:p xmlns:a="http://schemas.openxmlformats.org/drawingml/2006/main">
             <a:pPr algn="l">
+              <a:buNone/>
               <a:defRPr sz="1650" b="0">
                 <a:solidFill>
                   <a:srgbClr val="45606C"/>
@@ -3777,14 +2757,14 @@
       </p:sp>
       <p:pic>
         <p:nvPicPr>
-          <p:cNvPr id="13" name=""/>
+          <p:cNvPr id="15" name=""/>
           <p:cNvPicPr>
             <a:picLocks xmlns:a="http://schemas.openxmlformats.org/drawingml/2006/main" noChangeAspect="1"/>
           </p:cNvPicPr>
           <p:nvPr/>
         </p:nvPicPr>
         <p:blipFill>
-          <a:blip xmlns:r="http://schemas.openxmlformats.org/officeDocument/2006/relationships" xmlns:a="http://schemas.openxmlformats.org/drawingml/2006/main" r:embed="Rfa1561261f5948ec"/>
+          <a:blip xmlns:r="http://schemas.openxmlformats.org/officeDocument/2006/relationships" xmlns:a="http://schemas.openxmlformats.org/drawingml/2006/main" r:embed="R47c7c444a25f4087"/>
           <a:stretch xmlns:a="http://schemas.openxmlformats.org/drawingml/2006/main"/>
         </p:blipFill>
         <p:spPr>
@@ -3831,6 +2811,7 @@
           <a:lstStyle xmlns:a="http://schemas.openxmlformats.org/drawingml/2006/main"/>
           <a:p xmlns:a="http://schemas.openxmlformats.org/drawingml/2006/main">
             <a:pPr algn="l">
+              <a:buNone/>
               <a:defRPr sz="1350" b="0">
                 <a:solidFill>
                   <a:srgbClr val="45606C"/>
@@ -3917,6 +2898,7 @@
           <a:lstStyle xmlns:a="http://schemas.openxmlformats.org/drawingml/2006/main"/>
           <a:p xmlns:a="http://schemas.openxmlformats.org/drawingml/2006/main">
             <a:pPr algn="l">
+              <a:buNone/>
               <a:defRPr sz="3150" b="1">
                 <a:solidFill>
                   <a:srgbClr val="17313E"/>
@@ -3974,6 +2956,7 @@
           <a:lstStyle xmlns:a="http://schemas.openxmlformats.org/drawingml/2006/main"/>
           <a:p xmlns:a="http://schemas.openxmlformats.org/drawingml/2006/main">
             <a:pPr algn="l">
+              <a:buNone/>
               <a:defRPr sz="1650" b="0">
                 <a:solidFill>
                   <a:srgbClr val="45606C"/>
@@ -4065,6 +3048,7 @@
           <a:lstStyle xmlns:a="http://schemas.openxmlformats.org/drawingml/2006/main"/>
           <a:p xmlns:a="http://schemas.openxmlformats.org/drawingml/2006/main">
             <a:pPr algn="ctr">
+              <a:buNone/>
               <a:defRPr sz="2325" b="1">
                 <a:solidFill>
                   <a:srgbClr val="17313E"/>
@@ -4122,6 +3106,7 @@
           <a:lstStyle xmlns:a="http://schemas.openxmlformats.org/drawingml/2006/main"/>
           <a:p xmlns:a="http://schemas.openxmlformats.org/drawingml/2006/main">
             <a:pPr algn="ctr">
+              <a:buNone/>
               <a:defRPr sz="1575" b="0">
                 <a:solidFill>
                   <a:srgbClr val="007F86"/>
@@ -4211,6 +3196,7 @@
           <a:lstStyle xmlns:a="http://schemas.openxmlformats.org/drawingml/2006/main"/>
           <a:p xmlns:a="http://schemas.openxmlformats.org/drawingml/2006/main">
             <a:pPr algn="ctr">
+              <a:buNone/>
               <a:defRPr sz="2025" b="1">
                 <a:solidFill>
                   <a:srgbClr val="17313E"/>
@@ -4300,6 +3286,7 @@
           <a:lstStyle xmlns:a="http://schemas.openxmlformats.org/drawingml/2006/main"/>
           <a:p xmlns:a="http://schemas.openxmlformats.org/drawingml/2006/main">
             <a:pPr algn="ctr">
+              <a:buNone/>
               <a:defRPr sz="2025" b="1">
                 <a:solidFill>
                   <a:srgbClr val="17313E"/>
@@ -4357,6 +3344,7 @@
           <a:lstStyle xmlns:a="http://schemas.openxmlformats.org/drawingml/2006/main"/>
           <a:p xmlns:a="http://schemas.openxmlformats.org/drawingml/2006/main">
             <a:pPr algn="ctr">
+              <a:buNone/>
               <a:defRPr sz="1875" b="0">
                 <a:solidFill>
                   <a:srgbClr val="007F86"/>
@@ -4414,6 +3402,7 @@
           <a:lstStyle xmlns:a="http://schemas.openxmlformats.org/drawingml/2006/main"/>
           <a:p xmlns:a="http://schemas.openxmlformats.org/drawingml/2006/main">
             <a:pPr algn="ctr">
+              <a:buNone/>
               <a:defRPr sz="1875" b="0">
                 <a:solidFill>
                   <a:srgbClr val="007F86"/>
@@ -4471,6 +3460,7 @@
           <a:lstStyle xmlns:a="http://schemas.openxmlformats.org/drawingml/2006/main"/>
           <a:p xmlns:a="http://schemas.openxmlformats.org/drawingml/2006/main">
             <a:pPr algn="l">
+              <a:buNone/>
               <a:defRPr sz="1950" b="1">
                 <a:solidFill>
                   <a:srgbClr val="17313E"/>
@@ -4557,6 +3547,7 @@
           <a:lstStyle xmlns:a="http://schemas.openxmlformats.org/drawingml/2006/main"/>
           <a:p xmlns:a="http://schemas.openxmlformats.org/drawingml/2006/main">
             <a:pPr algn="l">
+              <a:buNone/>
               <a:defRPr sz="3150" b="1">
                 <a:solidFill>
                   <a:srgbClr val="17313E"/>
@@ -4614,6 +3605,7 @@
           <a:lstStyle xmlns:a="http://schemas.openxmlformats.org/drawingml/2006/main"/>
           <a:p xmlns:a="http://schemas.openxmlformats.org/drawingml/2006/main">
             <a:pPr algn="l">
+              <a:buNone/>
               <a:defRPr sz="2025" b="1">
                 <a:solidFill>
                   <a:srgbClr val="007F86"/>
@@ -4671,6 +3663,7 @@
           <a:lstStyle xmlns:a="http://schemas.openxmlformats.org/drawingml/2006/main"/>
           <a:p xmlns:a="http://schemas.openxmlformats.org/drawingml/2006/main">
             <a:pPr algn="l">
+              <a:buNone/>
               <a:defRPr sz="1950" b="0">
                 <a:solidFill>
                   <a:srgbClr val="17313E"/>
@@ -4694,6 +3687,7 @@
           </a:p>
           <a:p xmlns:a="http://schemas.openxmlformats.org/drawingml/2006/main">
             <a:pPr algn="l">
+              <a:buNone/>
               <a:defRPr sz="1950" b="0">
                 <a:solidFill>
                   <a:srgbClr val="17313E"/>
@@ -4717,6 +3711,7 @@
           </a:p>
           <a:p xmlns:a="http://schemas.openxmlformats.org/drawingml/2006/main">
             <a:pPr algn="l">
+              <a:buNone/>
               <a:defRPr sz="1950" b="0">
                 <a:solidFill>
                   <a:srgbClr val="17313E"/>
@@ -4774,6 +3769,7 @@
           <a:lstStyle xmlns:a="http://schemas.openxmlformats.org/drawingml/2006/main"/>
           <a:p xmlns:a="http://schemas.openxmlformats.org/drawingml/2006/main">
             <a:pPr algn="ctr">
+              <a:buNone/>
               <a:defRPr sz="3300" b="1">
                 <a:solidFill>
                   <a:srgbClr val="007F86"/>
@@ -4865,6 +3861,7 @@
           <a:lstStyle xmlns:a="http://schemas.openxmlformats.org/drawingml/2006/main"/>
           <a:p xmlns:a="http://schemas.openxmlformats.org/drawingml/2006/main">
             <a:pPr algn="ctr">
+              <a:buNone/>
               <a:defRPr sz="2325" b="1">
                 <a:solidFill>
                   <a:srgbClr val="007F86"/>
@@ -4922,6 +3919,7 @@
           <a:lstStyle xmlns:a="http://schemas.openxmlformats.org/drawingml/2006/main"/>
           <a:p xmlns:a="http://schemas.openxmlformats.org/drawingml/2006/main">
             <a:pPr algn="ctr">
+              <a:buNone/>
               <a:defRPr sz="1800" b="0">
                 <a:solidFill>
                   <a:srgbClr val="17313E"/>
@@ -4945,6 +3943,7 @@
           </a:p>
           <a:p xmlns:a="http://schemas.openxmlformats.org/drawingml/2006/main">
             <a:pPr algn="ctr">
+              <a:buNone/>
               <a:defRPr sz="1800" b="0">
                 <a:solidFill>
                   <a:srgbClr val="17313E"/>
@@ -5002,6 +4001,7 @@
           <a:lstStyle xmlns:a="http://schemas.openxmlformats.org/drawingml/2006/main"/>
           <a:p xmlns:a="http://schemas.openxmlformats.org/drawingml/2006/main">
             <a:pPr algn="ctr">
+              <a:buNone/>
               <a:defRPr sz="3300" b="1">
                 <a:solidFill>
                   <a:srgbClr val="007F86"/>
@@ -5059,6 +4059,7 @@
           <a:lstStyle xmlns:a="http://schemas.openxmlformats.org/drawingml/2006/main"/>
           <a:p xmlns:a="http://schemas.openxmlformats.org/drawingml/2006/main">
             <a:pPr algn="l">
+              <a:buNone/>
               <a:defRPr sz="2025" b="1">
                 <a:solidFill>
                   <a:srgbClr val="007F86"/>
@@ -5116,6 +4117,7 @@
           <a:lstStyle xmlns:a="http://schemas.openxmlformats.org/drawingml/2006/main"/>
           <a:p xmlns:a="http://schemas.openxmlformats.org/drawingml/2006/main">
             <a:pPr algn="l">
+              <a:buNone/>
               <a:defRPr sz="1875" b="0">
                 <a:solidFill>
                   <a:srgbClr val="17313E"/>
@@ -5139,6 +4141,7 @@
           </a:p>
           <a:p xmlns:a="http://schemas.openxmlformats.org/drawingml/2006/main">
             <a:pPr algn="l">
+              <a:buNone/>
               <a:defRPr sz="1875" b="0">
                 <a:solidFill>
                   <a:srgbClr val="17313E"/>
@@ -5162,6 +4165,7 @@
           </a:p>
           <a:p xmlns:a="http://schemas.openxmlformats.org/drawingml/2006/main">
             <a:pPr algn="l">
+              <a:buNone/>
               <a:defRPr sz="1875" b="0">
                 <a:solidFill>
                   <a:srgbClr val="17313E"/>
@@ -5219,6 +4223,7 @@
           <a:lstStyle xmlns:a="http://schemas.openxmlformats.org/drawingml/2006/main"/>
           <a:p xmlns:a="http://schemas.openxmlformats.org/drawingml/2006/main">
             <a:pPr algn="l">
+              <a:buNone/>
               <a:defRPr sz="1650" b="0">
                 <a:solidFill>
                   <a:srgbClr val="45606C"/>
@@ -5305,6 +4310,7 @@
           <a:lstStyle xmlns:a="http://schemas.openxmlformats.org/drawingml/2006/main"/>
           <a:p xmlns:a="http://schemas.openxmlformats.org/drawingml/2006/main">
             <a:pPr algn="l">
+              <a:buNone/>
               <a:defRPr sz="3150" b="1">
                 <a:solidFill>
                   <a:srgbClr val="17313E"/>
@@ -5362,6 +4368,7 @@
           <a:lstStyle xmlns:a="http://schemas.openxmlformats.org/drawingml/2006/main"/>
           <a:p xmlns:a="http://schemas.openxmlformats.org/drawingml/2006/main">
             <a:pPr algn="l">
+              <a:buNone/>
               <a:defRPr sz="1950" b="1">
                 <a:solidFill>
                   <a:srgbClr val="007F86"/>
@@ -5419,6 +4426,7 @@
           <a:lstStyle xmlns:a="http://schemas.openxmlformats.org/drawingml/2006/main"/>
           <a:p xmlns:a="http://schemas.openxmlformats.org/drawingml/2006/main">
             <a:pPr algn="l">
+              <a:buNone/>
               <a:defRPr sz="2475" b="1">
                 <a:solidFill>
                   <a:srgbClr val="17313E"/>
@@ -5476,6 +4484,7 @@
           <a:lstStyle xmlns:a="http://schemas.openxmlformats.org/drawingml/2006/main"/>
           <a:p xmlns:a="http://schemas.openxmlformats.org/drawingml/2006/main">
             <a:pPr algn="l">
+              <a:buNone/>
               <a:defRPr sz="1650" b="0">
                 <a:solidFill>
                   <a:srgbClr val="45606C"/>
@@ -5533,6 +4542,7 @@
           <a:lstStyle xmlns:a="http://schemas.openxmlformats.org/drawingml/2006/main"/>
           <a:p xmlns:a="http://schemas.openxmlformats.org/drawingml/2006/main">
             <a:pPr algn="l">
+              <a:buNone/>
               <a:defRPr sz="1500" b="0">
                 <a:solidFill>
                   <a:srgbClr val="D35C3D"/>
@@ -5590,6 +4600,7 @@
           <a:lstStyle xmlns:a="http://schemas.openxmlformats.org/drawingml/2006/main"/>
           <a:p xmlns:a="http://schemas.openxmlformats.org/drawingml/2006/main">
             <a:pPr algn="l">
+              <a:buNone/>
               <a:defRPr sz="1950" b="1">
                 <a:solidFill>
                   <a:srgbClr val="007F86"/>
@@ -5647,6 +4658,7 @@
           <a:lstStyle xmlns:a="http://schemas.openxmlformats.org/drawingml/2006/main"/>
           <a:p xmlns:a="http://schemas.openxmlformats.org/drawingml/2006/main">
             <a:pPr algn="l">
+              <a:buNone/>
               <a:defRPr sz="2475" b="1">
                 <a:solidFill>
                   <a:srgbClr val="17313E"/>
@@ -5704,6 +4716,7 @@
           <a:lstStyle xmlns:a="http://schemas.openxmlformats.org/drawingml/2006/main"/>
           <a:p xmlns:a="http://schemas.openxmlformats.org/drawingml/2006/main">
             <a:pPr algn="l">
+              <a:buNone/>
               <a:defRPr sz="1650" b="0">
                 <a:solidFill>
                   <a:srgbClr val="45606C"/>
@@ -5761,6 +4774,7 @@
           <a:lstStyle xmlns:a="http://schemas.openxmlformats.org/drawingml/2006/main"/>
           <a:p xmlns:a="http://schemas.openxmlformats.org/drawingml/2006/main">
             <a:pPr algn="l">
+              <a:buNone/>
               <a:defRPr sz="1500" b="0">
                 <a:solidFill>
                   <a:srgbClr val="D35C3D"/>
@@ -5847,6 +4861,7 @@
           <a:lstStyle xmlns:a="http://schemas.openxmlformats.org/drawingml/2006/main"/>
           <a:p xmlns:a="http://schemas.openxmlformats.org/drawingml/2006/main">
             <a:pPr algn="l">
+              <a:buNone/>
               <a:defRPr sz="3150" b="1">
                 <a:solidFill>
                   <a:srgbClr val="17313E"/>
@@ -5904,6 +4919,7 @@
           <a:lstStyle xmlns:a="http://schemas.openxmlformats.org/drawingml/2006/main"/>
           <a:p xmlns:a="http://schemas.openxmlformats.org/drawingml/2006/main">
             <a:pPr algn="l">
+              <a:buNone/>
               <a:defRPr sz="2025" b="1">
                 <a:solidFill>
                   <a:srgbClr val="007F86"/>
@@ -5961,6 +4977,7 @@
           <a:lstStyle xmlns:a="http://schemas.openxmlformats.org/drawingml/2006/main"/>
           <a:p xmlns:a="http://schemas.openxmlformats.org/drawingml/2006/main">
             <a:pPr algn="l">
+              <a:buNone/>
               <a:defRPr sz="2175" b="1">
                 <a:solidFill>
                   <a:srgbClr val="17313E"/>
@@ -6018,6 +5035,7 @@
           <a:lstStyle xmlns:a="http://schemas.openxmlformats.org/drawingml/2006/main"/>
           <a:p xmlns:a="http://schemas.openxmlformats.org/drawingml/2006/main">
             <a:pPr algn="l">
+              <a:buNone/>
               <a:defRPr sz="1875" b="0">
                 <a:solidFill>
                   <a:srgbClr val="17313E"/>
@@ -6075,6 +5093,7 @@
           <a:lstStyle xmlns:a="http://schemas.openxmlformats.org/drawingml/2006/main"/>
           <a:p xmlns:a="http://schemas.openxmlformats.org/drawingml/2006/main">
             <a:pPr algn="l">
+              <a:buNone/>
               <a:defRPr sz="1875" b="0">
                 <a:solidFill>
                   <a:srgbClr val="17313E"/>
@@ -6132,6 +5151,7 @@
           <a:lstStyle xmlns:a="http://schemas.openxmlformats.org/drawingml/2006/main"/>
           <a:p xmlns:a="http://schemas.openxmlformats.org/drawingml/2006/main">
             <a:pPr algn="l">
+              <a:buNone/>
               <a:defRPr sz="1650" b="0">
                 <a:solidFill>
                   <a:srgbClr val="45606C"/>
@@ -6218,6 +5238,7 @@
           <a:lstStyle xmlns:a="http://schemas.openxmlformats.org/drawingml/2006/main"/>
           <a:p xmlns:a="http://schemas.openxmlformats.org/drawingml/2006/main">
             <a:pPr algn="l">
+              <a:buNone/>
               <a:defRPr sz="3150" b="1">
                 <a:solidFill>
                   <a:srgbClr val="17313E"/>
@@ -6275,6 +5296,7 @@
           <a:lstStyle xmlns:a="http://schemas.openxmlformats.org/drawingml/2006/main"/>
           <a:p xmlns:a="http://schemas.openxmlformats.org/drawingml/2006/main">
             <a:pPr algn="l">
+              <a:buNone/>
               <a:defRPr sz="1950" b="1">
                 <a:solidFill>
                   <a:srgbClr val="007F86"/>
@@ -6332,6 +5354,7 @@
           <a:lstStyle xmlns:a="http://schemas.openxmlformats.org/drawingml/2006/main"/>
           <a:p xmlns:a="http://schemas.openxmlformats.org/drawingml/2006/main">
             <a:pPr algn="l">
+              <a:buNone/>
               <a:defRPr sz="1875" b="0">
                 <a:solidFill>
                   <a:srgbClr val="17313E"/>
@@ -6355,6 +5378,7 @@
           </a:p>
           <a:p xmlns:a="http://schemas.openxmlformats.org/drawingml/2006/main">
             <a:pPr algn="l">
+              <a:buNone/>
               <a:defRPr sz="1875" b="0">
                 <a:solidFill>
                   <a:srgbClr val="17313E"/>
@@ -6412,6 +5436,7 @@
           <a:lstStyle xmlns:a="http://schemas.openxmlformats.org/drawingml/2006/main"/>
           <a:p xmlns:a="http://schemas.openxmlformats.org/drawingml/2006/main">
             <a:pPr algn="l">
+              <a:buNone/>
               <a:defRPr sz="1950" b="1">
                 <a:solidFill>
                   <a:srgbClr val="007F86"/>
@@ -6469,6 +5494,7 @@
           <a:lstStyle xmlns:a="http://schemas.openxmlformats.org/drawingml/2006/main"/>
           <a:p xmlns:a="http://schemas.openxmlformats.org/drawingml/2006/main">
             <a:pPr algn="l">
+              <a:buNone/>
               <a:defRPr sz="1875" b="0">
                 <a:solidFill>
                   <a:srgbClr val="17313E"/>
@@ -6492,6 +5518,7 @@
           </a:p>
           <a:p xmlns:a="http://schemas.openxmlformats.org/drawingml/2006/main">
             <a:pPr algn="l">
+              <a:buNone/>
               <a:defRPr sz="1875" b="0">
                 <a:solidFill>
                   <a:srgbClr val="17313E"/>
@@ -6515,6 +5542,7 @@
           </a:p>
           <a:p xmlns:a="http://schemas.openxmlformats.org/drawingml/2006/main">
             <a:pPr algn="l">
+              <a:buNone/>
               <a:defRPr sz="1875" b="0">
                 <a:solidFill>
                   <a:srgbClr val="17313E"/>
@@ -6572,6 +5600,7 @@
           <a:lstStyle xmlns:a="http://schemas.openxmlformats.org/drawingml/2006/main"/>
           <a:p xmlns:a="http://schemas.openxmlformats.org/drawingml/2006/main">
             <a:pPr algn="l">
+              <a:buNone/>
               <a:defRPr sz="1425" b="0">
                 <a:solidFill>
                   <a:srgbClr val="45606C"/>
@@ -6597,14 +5626,14 @@
       </p:sp>
       <p:pic>
         <p:nvPicPr>
-          <p:cNvPr id="14" name=""/>
+          <p:cNvPr id="16" name=""/>
           <p:cNvPicPr>
             <a:picLocks xmlns:a="http://schemas.openxmlformats.org/drawingml/2006/main" noChangeAspect="1"/>
           </p:cNvPicPr>
           <p:nvPr/>
         </p:nvPicPr>
         <p:blipFill>
-          <a:blip xmlns:r="http://schemas.openxmlformats.org/officeDocument/2006/relationships" xmlns:a="http://schemas.openxmlformats.org/drawingml/2006/main" r:embed="R1d47290a459449a0"/>
+          <a:blip xmlns:r="http://schemas.openxmlformats.org/officeDocument/2006/relationships" xmlns:a="http://schemas.openxmlformats.org/drawingml/2006/main" r:embed="R4946105ab44346ff"/>
           <a:stretch xmlns:a="http://schemas.openxmlformats.org/drawingml/2006/main"/>
         </p:blipFill>
         <p:spPr>
